--- a/Poster (59.4 x 84.1 cm).pptx
+++ b/Poster (59.4 x 84.1 cm).pptx
@@ -7690,128 +7690,61 @@
           </p:txBody>
         </p:sp>
       </p:grpSp>
-      <p:grpSp>
-        <p:nvGrpSpPr>
-          <p:cNvPr name="Group 54" id="54"/>
-          <p:cNvGrpSpPr/>
+      <p:sp>
+        <p:nvSpPr>
+          <p:cNvPr name="Freeform 54" id="54"/>
+          <p:cNvSpPr/>
           <p:nvPr/>
-        </p:nvGrpSpPr>
-        <p:grpSpPr>
-          <a:xfrm rot="0">
+        </p:nvSpPr>
+        <p:spPr>
+          <a:xfrm flipH="false" flipV="false" rot="0">
             <a:off x="18679905" y="27579697"/>
             <a:ext cx="2286459" cy="2286459"/>
-            <a:chOff x="0" y="0"/>
-            <a:chExt cx="3048612" cy="3048612"/>
           </a:xfrm>
-        </p:grpSpPr>
-        <p:sp>
-          <p:nvSpPr>
-            <p:cNvPr name="Freeform 55" id="55"/>
-            <p:cNvSpPr/>
-            <p:nvPr/>
-          </p:nvSpPr>
-          <p:spPr>
-            <a:xfrm flipH="false" flipV="false" rot="0">
-              <a:off x="0" y="0"/>
-              <a:ext cx="3048612" cy="3048612"/>
-            </a:xfrm>
-            <a:custGeom>
-              <a:avLst/>
-              <a:gdLst/>
-              <a:ahLst/>
-              <a:cxnLst/>
-              <a:rect r="r" b="b" t="t" l="l"/>
-              <a:pathLst>
-                <a:path h="3048612" w="3048612">
-                  <a:moveTo>
-                    <a:pt x="0" y="0"/>
-                  </a:moveTo>
-                  <a:lnTo>
-                    <a:pt x="3048612" y="0"/>
-                  </a:lnTo>
-                  <a:lnTo>
-                    <a:pt x="3048612" y="3048612"/>
-                  </a:lnTo>
-                  <a:lnTo>
-                    <a:pt x="0" y="3048612"/>
-                  </a:lnTo>
-                  <a:lnTo>
-                    <a:pt x="0" y="0"/>
-                  </a:lnTo>
-                  <a:close/>
-                </a:path>
-              </a:pathLst>
-            </a:custGeom>
-            <a:blipFill>
-              <a:blip r:embed="rId9">
-                <a:extLst>
-                  <a:ext uri="{96DAC541-7B7A-43D3-8B79-37D633B846F1}">
-                    <asvg:svgBlip xmlns:asvg="http://schemas.microsoft.com/office/drawing/2016/SVG/main" r:embed="rId10"/>
-                  </a:ext>
-                </a:extLst>
-              </a:blip>
-              <a:stretch>
-                <a:fillRect l="0" t="0" r="0" b="0"/>
-              </a:stretch>
-            </a:blipFill>
-          </p:spPr>
-        </p:sp>
-        <p:sp>
-          <p:nvSpPr>
-            <p:cNvPr name="Freeform 56" id="56"/>
-            <p:cNvSpPr/>
-            <p:nvPr/>
-          </p:nvSpPr>
-          <p:spPr>
-            <a:xfrm flipH="false" flipV="false" rot="0">
-              <a:off x="136500" y="136357"/>
-              <a:ext cx="2783314" cy="2783314"/>
-            </a:xfrm>
-            <a:custGeom>
-              <a:avLst/>
-              <a:gdLst/>
-              <a:ahLst/>
-              <a:cxnLst/>
-              <a:rect r="r" b="b" t="t" l="l"/>
-              <a:pathLst>
-                <a:path h="2783314" w="2783314">
-                  <a:moveTo>
-                    <a:pt x="0" y="0"/>
-                  </a:moveTo>
-                  <a:lnTo>
-                    <a:pt x="2783314" y="0"/>
-                  </a:lnTo>
-                  <a:lnTo>
-                    <a:pt x="2783314" y="2783314"/>
-                  </a:lnTo>
-                  <a:lnTo>
-                    <a:pt x="0" y="2783314"/>
-                  </a:lnTo>
-                  <a:lnTo>
-                    <a:pt x="0" y="0"/>
-                  </a:lnTo>
-                  <a:close/>
-                </a:path>
-              </a:pathLst>
-            </a:custGeom>
-            <a:blipFill>
-              <a:blip r:embed="rId11">
-                <a:extLst>
-                  <a:ext uri="{96DAC541-7B7A-43D3-8B79-37D633B846F1}">
-                    <asvg:svgBlip xmlns:asvg="http://schemas.microsoft.com/office/drawing/2016/SVG/main" r:embed="rId12"/>
-                  </a:ext>
-                </a:extLst>
-              </a:blip>
-              <a:stretch>
-                <a:fillRect l="0" t="0" r="0" b="0"/>
-              </a:stretch>
-            </a:blipFill>
-          </p:spPr>
-        </p:sp>
-      </p:grpSp>
-      <p:sp>
-        <p:nvSpPr>
-          <p:cNvPr name="Freeform 57" id="57"/>
+          <a:custGeom>
+            <a:avLst/>
+            <a:gdLst/>
+            <a:ahLst/>
+            <a:cxnLst/>
+            <a:rect r="r" b="b" t="t" l="l"/>
+            <a:pathLst>
+              <a:path h="2286459" w="2286459">
+                <a:moveTo>
+                  <a:pt x="0" y="0"/>
+                </a:moveTo>
+                <a:lnTo>
+                  <a:pt x="2286459" y="0"/>
+                </a:lnTo>
+                <a:lnTo>
+                  <a:pt x="2286459" y="2286459"/>
+                </a:lnTo>
+                <a:lnTo>
+                  <a:pt x="0" y="2286459"/>
+                </a:lnTo>
+                <a:lnTo>
+                  <a:pt x="0" y="0"/>
+                </a:lnTo>
+                <a:close/>
+              </a:path>
+            </a:pathLst>
+          </a:custGeom>
+          <a:blipFill>
+            <a:blip r:embed="rId9">
+              <a:extLst>
+                <a:ext uri="{96DAC541-7B7A-43D3-8B79-37D633B846F1}">
+                  <asvg:svgBlip xmlns:asvg="http://schemas.microsoft.com/office/drawing/2016/SVG/main" r:embed="rId10"/>
+                </a:ext>
+              </a:extLst>
+            </a:blip>
+            <a:stretch>
+              <a:fillRect l="0" t="0" r="0" b="0"/>
+            </a:stretch>
+          </a:blipFill>
+        </p:spPr>
+      </p:sp>
+      <p:sp>
+        <p:nvSpPr>
+          <p:cNvPr name="Freeform 55" id="55"/>
           <p:cNvSpPr/>
           <p:nvPr/>
         </p:nvSpPr>
@@ -7848,7 +7781,7 @@
             </a:pathLst>
           </a:custGeom>
           <a:blipFill>
-            <a:blip r:embed="rId13"/>
+            <a:blip r:embed="rId11"/>
             <a:stretch>
               <a:fillRect l="0" t="0" r="0" b="0"/>
             </a:stretch>
@@ -7857,7 +7790,7 @@
       </p:sp>
       <p:sp>
         <p:nvSpPr>
-          <p:cNvPr name="Freeform 58" id="58"/>
+          <p:cNvPr name="Freeform 56" id="56"/>
           <p:cNvSpPr/>
           <p:nvPr/>
         </p:nvSpPr>
@@ -7894,7 +7827,7 @@
             </a:pathLst>
           </a:custGeom>
           <a:blipFill>
-            <a:blip r:embed="rId14"/>
+            <a:blip r:embed="rId12"/>
             <a:stretch>
               <a:fillRect l="0" t="0" r="0" b="0"/>
             </a:stretch>
@@ -7903,7 +7836,59 @@
       </p:sp>
       <p:sp>
         <p:nvSpPr>
-          <p:cNvPr name="TextBox 59" id="59"/>
+          <p:cNvPr name="Freeform 57" id="57"/>
+          <p:cNvSpPr/>
+          <p:nvPr/>
+        </p:nvSpPr>
+        <p:spPr>
+          <a:xfrm flipH="false" flipV="false" rot="0">
+            <a:off x="18737456" y="27636656"/>
+            <a:ext cx="2170378" cy="2170378"/>
+          </a:xfrm>
+          <a:custGeom>
+            <a:avLst/>
+            <a:gdLst/>
+            <a:ahLst/>
+            <a:cxnLst/>
+            <a:rect r="r" b="b" t="t" l="l"/>
+            <a:pathLst>
+              <a:path h="2170378" w="2170378">
+                <a:moveTo>
+                  <a:pt x="0" y="0"/>
+                </a:moveTo>
+                <a:lnTo>
+                  <a:pt x="2170378" y="0"/>
+                </a:lnTo>
+                <a:lnTo>
+                  <a:pt x="2170378" y="2170378"/>
+                </a:lnTo>
+                <a:lnTo>
+                  <a:pt x="0" y="2170378"/>
+                </a:lnTo>
+                <a:lnTo>
+                  <a:pt x="0" y="0"/>
+                </a:lnTo>
+                <a:close/>
+              </a:path>
+            </a:pathLst>
+          </a:custGeom>
+          <a:blipFill>
+            <a:blip r:embed="rId13">
+              <a:extLst>
+                <a:ext uri="{96DAC541-7B7A-43D3-8B79-37D633B846F1}">
+                  <asvg:svgBlip xmlns:asvg="http://schemas.microsoft.com/office/drawing/2016/SVG/main" r:embed="rId14"/>
+                </a:ext>
+              </a:extLst>
+            </a:blip>
+            <a:stretch>
+              <a:fillRect l="0" t="0" r="0" b="0"/>
+            </a:stretch>
+          </a:blipFill>
+        </p:spPr>
+      </p:sp>
+      <p:sp>
+        <p:nvSpPr>
+          <p:cNvPr name="TextBox 58" id="58"/>
           <p:cNvSpPr txBox="true"/>
           <p:nvPr/>
         </p:nvSpPr>
@@ -7956,7 +7941,7 @@
       </p:sp>
       <p:sp>
         <p:nvSpPr>
-          <p:cNvPr name="TextBox 60" id="60"/>
+          <p:cNvPr name="TextBox 59" id="59"/>
           <p:cNvSpPr txBox="true"/>
           <p:nvPr/>
         </p:nvSpPr>
@@ -8140,7 +8125,7 @@
       </p:sp>
       <p:sp>
         <p:nvSpPr>
-          <p:cNvPr name="TextBox 61" id="61"/>
+          <p:cNvPr name="TextBox 60" id="60"/>
           <p:cNvSpPr txBox="true"/>
           <p:nvPr/>
         </p:nvSpPr>
@@ -8193,7 +8178,7 @@
       </p:sp>
       <p:sp>
         <p:nvSpPr>
-          <p:cNvPr name="TextBox 62" id="62"/>
+          <p:cNvPr name="TextBox 61" id="61"/>
           <p:cNvSpPr txBox="true"/>
           <p:nvPr/>
         </p:nvSpPr>
@@ -8241,7 +8226,7 @@
       </p:sp>
       <p:sp>
         <p:nvSpPr>
-          <p:cNvPr name="TextBox 63" id="63"/>
+          <p:cNvPr name="TextBox 62" id="62"/>
           <p:cNvSpPr txBox="true"/>
           <p:nvPr/>
         </p:nvSpPr>
@@ -8282,7 +8267,7 @@
       </p:sp>
       <p:sp>
         <p:nvSpPr>
-          <p:cNvPr name="TextBox 64" id="64"/>
+          <p:cNvPr name="TextBox 63" id="63"/>
           <p:cNvSpPr txBox="true"/>
           <p:nvPr/>
         </p:nvSpPr>
@@ -8338,7 +8323,7 @@
       </p:sp>
       <p:sp>
         <p:nvSpPr>
-          <p:cNvPr name="TextBox 65" id="65"/>
+          <p:cNvPr name="TextBox 64" id="64"/>
           <p:cNvSpPr txBox="true"/>
           <p:nvPr/>
         </p:nvSpPr>
@@ -8379,7 +8364,7 @@
       </p:sp>
       <p:sp>
         <p:nvSpPr>
-          <p:cNvPr name="TextBox 66" id="66"/>
+          <p:cNvPr name="TextBox 65" id="65"/>
           <p:cNvSpPr txBox="true"/>
           <p:nvPr/>
         </p:nvSpPr>
@@ -8420,7 +8405,7 @@
       </p:sp>
       <p:sp>
         <p:nvSpPr>
-          <p:cNvPr name="TextBox 67" id="67"/>
+          <p:cNvPr name="TextBox 66" id="66"/>
           <p:cNvSpPr txBox="true"/>
           <p:nvPr/>
         </p:nvSpPr>
@@ -8461,7 +8446,7 @@
       </p:sp>
       <p:sp>
         <p:nvSpPr>
-          <p:cNvPr name="TextBox 68" id="68"/>
+          <p:cNvPr name="TextBox 67" id="67"/>
           <p:cNvSpPr txBox="true"/>
           <p:nvPr/>
         </p:nvSpPr>
@@ -8505,7 +8490,7 @@
       </p:sp>
       <p:sp>
         <p:nvSpPr>
-          <p:cNvPr name="TextBox 69" id="69"/>
+          <p:cNvPr name="TextBox 68" id="68"/>
           <p:cNvSpPr txBox="true"/>
           <p:nvPr/>
         </p:nvSpPr>
@@ -8551,7 +8536,7 @@
       </p:sp>
       <p:sp>
         <p:nvSpPr>
-          <p:cNvPr name="TextBox 70" id="70"/>
+          <p:cNvPr name="TextBox 69" id="69"/>
           <p:cNvSpPr txBox="true"/>
           <p:nvPr/>
         </p:nvSpPr>
@@ -8592,7 +8577,7 @@
       </p:sp>
       <p:sp>
         <p:nvSpPr>
-          <p:cNvPr name="TextBox 71" id="71"/>
+          <p:cNvPr name="TextBox 70" id="70"/>
           <p:cNvSpPr txBox="true"/>
           <p:nvPr/>
         </p:nvSpPr>
@@ -8747,7 +8732,7 @@
       </p:sp>
       <p:sp>
         <p:nvSpPr>
-          <p:cNvPr name="TextBox 72" id="72"/>
+          <p:cNvPr name="TextBox 71" id="71"/>
           <p:cNvSpPr txBox="true"/>
           <p:nvPr/>
         </p:nvSpPr>
@@ -8800,7 +8785,7 @@
       </p:sp>
       <p:sp>
         <p:nvSpPr>
-          <p:cNvPr name="TextBox 73" id="73"/>
+          <p:cNvPr name="TextBox 72" id="72"/>
           <p:cNvSpPr txBox="true"/>
           <p:nvPr/>
         </p:nvSpPr>
@@ -8853,7 +8838,7 @@
       </p:sp>
       <p:sp>
         <p:nvSpPr>
-          <p:cNvPr name="TextBox 74" id="74"/>
+          <p:cNvPr name="TextBox 73" id="73"/>
           <p:cNvSpPr txBox="true"/>
           <p:nvPr/>
         </p:nvSpPr>
@@ -8907,7 +8892,7 @@
       </p:sp>
       <p:sp>
         <p:nvSpPr>
-          <p:cNvPr name="TextBox 75" id="75"/>
+          <p:cNvPr name="TextBox 74" id="74"/>
           <p:cNvSpPr txBox="true"/>
           <p:nvPr/>
         </p:nvSpPr>
@@ -8951,7 +8936,7 @@
       </p:sp>
       <p:sp>
         <p:nvSpPr>
-          <p:cNvPr name="TextBox 76" id="76"/>
+          <p:cNvPr name="TextBox 75" id="75"/>
           <p:cNvSpPr txBox="true"/>
           <p:nvPr/>
         </p:nvSpPr>
@@ -8995,7 +8980,7 @@
       </p:sp>
       <p:sp>
         <p:nvSpPr>
-          <p:cNvPr name="TextBox 77" id="77"/>
+          <p:cNvPr name="TextBox 76" id="76"/>
           <p:cNvSpPr txBox="true"/>
           <p:nvPr/>
         </p:nvSpPr>
@@ -9055,7 +9040,7 @@
       </p:sp>
       <p:sp>
         <p:nvSpPr>
-          <p:cNvPr name="TextBox 78" id="78"/>
+          <p:cNvPr name="TextBox 77" id="77"/>
           <p:cNvSpPr txBox="true"/>
           <p:nvPr/>
         </p:nvSpPr>
@@ -9159,7 +9144,7 @@
       </p:sp>
       <p:sp>
         <p:nvSpPr>
-          <p:cNvPr name="TextBox 79" id="79"/>
+          <p:cNvPr name="TextBox 78" id="78"/>
           <p:cNvSpPr txBox="true"/>
           <p:nvPr/>
         </p:nvSpPr>
@@ -9212,7 +9197,7 @@
       </p:sp>
       <p:sp>
         <p:nvSpPr>
-          <p:cNvPr name="TextBox 80" id="80"/>
+          <p:cNvPr name="TextBox 79" id="79"/>
           <p:cNvSpPr txBox="true"/>
           <p:nvPr/>
         </p:nvSpPr>
@@ -9365,7 +9350,7 @@
       </p:sp>
       <p:sp>
         <p:nvSpPr>
-          <p:cNvPr name="TextBox 81" id="81"/>
+          <p:cNvPr name="TextBox 80" id="80"/>
           <p:cNvSpPr txBox="true"/>
           <p:nvPr/>
         </p:nvSpPr>
